--- a/docs/NetBaseline_AI_Technical_Presentation.pptx
+++ b/docs/NetBaseline_AI_Technical_Presentation.pptx
@@ -2653,7 +2653,7 @@
                 <a:ea typeface="Calibri" pitchFamily="34" charset="-122"/>
                 <a:cs typeface="Calibri" pitchFamily="34" charset="-120"/>
               </a:rPr>
-              <a:t>one engine, per-vendor JSON rule packs</a:t>
+              <a:t>one engine, JSON rule packs · CLI or JSON input</a:t>
             </a:r>
             <a:endParaRPr lang="en-US" sz="1000" dirty="0"/>
           </a:p>
@@ -3268,7 +3268,7 @@
                 <a:ea typeface="Calibri" pitchFamily="34" charset="-122"/>
                 <a:cs typeface="Calibri" pitchFamily="34" charset="-120"/>
               </a:rPr>
-              <a:t>pure comparison · PASS / FAIL / UNKNOWN</a:t>
+              <a:t>pure comparison · PASS / FAIL / UNKNOWN / N/A</a:t>
             </a:r>
             <a:endParaRPr lang="en-US" sz="1000" dirty="0"/>
           </a:p>
@@ -3691,7 +3691,7 @@
                 <a:ea typeface="Calibri" pitchFamily="34" charset="-122"/>
                 <a:cs typeface="Calibri" pitchFamily="34" charset="-120"/>
               </a:rPr>
-              <a:t>PDF report, credentials masked</a:t>
+              <a:t>Per-device PDF, bulk zip, credentials masked</a:t>
             </a:r>
             <a:endParaRPr lang="en-US" sz="1050" dirty="0"/>
           </a:p>
@@ -3730,7 +3730,7 @@
                 <a:ea typeface="Calibri" pitchFamily="34" charset="-122"/>
                 <a:cs typeface="Calibri" pitchFamily="34" charset="-120"/>
               </a:rPr>
-              <a:t>React + Vite  ·  FastAPI + Pydantic  ·  SQLite  ·  ReportLab  ·  bge-small ONNX (no torch)  ·  any OpenAI-compatible endpoint</a:t>
+              <a:t>React + Vite  ·  FastAPI + Pydantic  ·  SQLite  ·  ReportLab  ·  bge-small ONNX (no torch)  ·  any OpenAI-compatible endpoint  ·  Netmiko (optional)</a:t>
             </a:r>
             <a:endParaRPr lang="en-US" sz="1000" dirty="0"/>
           </a:p>
@@ -5995,7 +5995,7 @@
                 <a:ea typeface="Calibri" pitchFamily="34" charset="-122"/>
                 <a:cs typeface="Calibri" pitchFamily="34" charset="-120"/>
               </a:rPr>
-              <a:t>Four device configurations, three shipped parsers, and one vendor deliberately left unsupported to prove the path.</a:t>
+              <a:t>Six configurations, five vendor packs, one vendor deliberately left unsupported — and a cloud firewall that is not a CLI at all.</a:t>
             </a:r>
             <a:endParaRPr lang="en-US" sz="1400" dirty="0"/>
           </a:p>
@@ -6349,7 +6349,7 @@
                 <a:ea typeface="Cambria" pitchFamily="34" charset="-122"/>
                 <a:cs typeface="Cambria" pitchFamily="34" charset="-120"/>
               </a:rPr>
-              <a:t>92</a:t>
+              <a:t>164</a:t>
             </a:r>
             <a:endParaRPr lang="en-US" sz="3400" dirty="0"/>
           </a:p>
@@ -6427,7 +6427,7 @@
                 <a:ea typeface="Calibri" pitchFamily="34" charset="-122"/>
                 <a:cs typeface="Calibri" pitchFamily="34" charset="-120"/>
               </a:rPr>
-              <a:t>redaction, parsing, verdicts, and the learning loop</a:t>
+              <a:t>redaction, parsing, verdicts, learning, bulk, SSH</a:t>
             </a:r>
             <a:endParaRPr lang="en-US" sz="950" dirty="0"/>
           </a:p>
@@ -6493,7 +6493,7 @@
                 <a:ea typeface="Cambria" pitchFamily="34" charset="-122"/>
                 <a:cs typeface="Cambria" pitchFamily="34" charset="-120"/>
               </a:rPr>
-              <a:t>~12 ms</a:t>
+              <a:t>≤13 ms</a:t>
             </a:r>
             <a:endParaRPr lang="en-US" sz="3400" dirty="0"/>
           </a:p>
@@ -6571,7 +6571,7 @@
                 <a:ea typeface="Calibri" pitchFamily="34" charset="-122"/>
                 <a:cs typeface="Calibri" pitchFamily="34" charset="-120"/>
               </a:rPr>
-              <a:t>ingest to verdict, end to end</a:t>
+              <a:t>ingest to verdict, deterministic path</a:t>
             </a:r>
             <a:endParaRPr lang="en-US" sz="950" dirty="0"/>
           </a:p>
@@ -6768,24 +6768,24 @@
         </p:nvSpPr>
         <p:spPr>
           <a:xfrm>
-            <a:off x="768096" y="3840480"/>
-            <a:ext cx="1737360" cy="292608"/>
-          </a:xfrm>
-          <a:prstGeom prst="rect">
-            <a:avLst/>
-          </a:prstGeom>
-          <a:noFill/>
-          <a:ln/>
-        </p:spPr>
-        <p:txBody>
-          <a:bodyPr wrap="square" lIns="0" tIns="0" rIns="0" bIns="0" rtlCol="0" anchor="ctr"/>
-          <a:lstStyle/>
-          <a:p>
-            <a:pPr indent="0" marL="0">
-              <a:buNone/>
-            </a:pPr>
-            <a:r>
-              <a:rPr lang="en-US" sz="1000" dirty="0">
+            <a:off x="768096" y="3785616"/>
+            <a:ext cx="1737360" cy="256032"/>
+          </a:xfrm>
+          <a:prstGeom prst="rect">
+            <a:avLst/>
+          </a:prstGeom>
+          <a:noFill/>
+          <a:ln/>
+        </p:spPr>
+        <p:txBody>
+          <a:bodyPr wrap="square" lIns="0" tIns="0" rIns="0" bIns="0" rtlCol="0" anchor="ctr"/>
+          <a:lstStyle/>
+          <a:p>
+            <a:pPr indent="0" marL="0">
+              <a:buNone/>
+            </a:pPr>
+            <a:r>
+              <a:rPr lang="en-US" sz="950" dirty="0">
                 <a:solidFill>
                   <a:srgbClr val="E9EFF6"/>
                 </a:solidFill>
@@ -6795,7 +6795,7 @@
               </a:rPr>
               <a:t>Cisco IOS-XE</a:t>
             </a:r>
-            <a:endParaRPr lang="en-US" sz="1000" dirty="0"/>
+            <a:endParaRPr lang="en-US" sz="950" dirty="0"/>
           </a:p>
         </p:txBody>
       </p:sp>
@@ -6807,24 +6807,24 @@
         </p:nvSpPr>
         <p:spPr>
           <a:xfrm>
-            <a:off x="2670048" y="3840480"/>
-            <a:ext cx="1828800" cy="292608"/>
-          </a:xfrm>
-          <a:prstGeom prst="rect">
-            <a:avLst/>
-          </a:prstGeom>
-          <a:noFill/>
-          <a:ln/>
-        </p:spPr>
-        <p:txBody>
-          <a:bodyPr wrap="square" lIns="0" tIns="0" rIns="0" bIns="0" rtlCol="0" anchor="ctr"/>
-          <a:lstStyle/>
-          <a:p>
-            <a:pPr indent="0" marL="0">
-              <a:buNone/>
-            </a:pPr>
-            <a:r>
-              <a:rPr lang="en-US" sz="1000" dirty="0">
+            <a:off x="2670048" y="3785616"/>
+            <a:ext cx="1828800" cy="256032"/>
+          </a:xfrm>
+          <a:prstGeom prst="rect">
+            <a:avLst/>
+          </a:prstGeom>
+          <a:noFill/>
+          <a:ln/>
+        </p:spPr>
+        <p:txBody>
+          <a:bodyPr wrap="square" lIns="0" tIns="0" rIns="0" bIns="0" rtlCol="0" anchor="ctr"/>
+          <a:lstStyle/>
+          <a:p>
+            <a:pPr indent="0" marL="0">
+              <a:buNone/>
+            </a:pPr>
+            <a:r>
+              <a:rPr lang="en-US" sz="950" dirty="0">
                 <a:solidFill>
                   <a:srgbClr val="93A4B8"/>
                 </a:solidFill>
@@ -6834,7 +6834,7 @@
               </a:rPr>
               <a:t>Catalyst 9300</a:t>
             </a:r>
-            <a:endParaRPr lang="en-US" sz="1000" dirty="0"/>
+            <a:endParaRPr lang="en-US" sz="950" dirty="0"/>
           </a:p>
         </p:txBody>
       </p:sp>
@@ -6846,24 +6846,24 @@
         </p:nvSpPr>
         <p:spPr>
           <a:xfrm>
-            <a:off x="4544568" y="3840480"/>
-            <a:ext cx="1737360" cy="292608"/>
-          </a:xfrm>
-          <a:prstGeom prst="rect">
-            <a:avLst/>
-          </a:prstGeom>
-          <a:noFill/>
-          <a:ln/>
-        </p:spPr>
-        <p:txBody>
-          <a:bodyPr wrap="square" lIns="0" tIns="0" rIns="0" bIns="0" rtlCol="0" anchor="ctr"/>
-          <a:lstStyle/>
-          <a:p>
-            <a:pPr indent="0" marL="0">
-              <a:buNone/>
-            </a:pPr>
-            <a:r>
-              <a:rPr lang="en-US" sz="1000" dirty="0">
+            <a:off x="4544568" y="3785616"/>
+            <a:ext cx="1737360" cy="256032"/>
+          </a:xfrm>
+          <a:prstGeom prst="rect">
+            <a:avLst/>
+          </a:prstGeom>
+          <a:noFill/>
+          <a:ln/>
+        </p:spPr>
+        <p:txBody>
+          <a:bodyPr wrap="square" lIns="0" tIns="0" rIns="0" bIns="0" rtlCol="0" anchor="ctr"/>
+          <a:lstStyle/>
+          <a:p>
+            <a:pPr indent="0" marL="0">
+              <a:buNone/>
+            </a:pPr>
+            <a:r>
+              <a:rPr lang="en-US" sz="950" dirty="0">
                 <a:solidFill>
                   <a:srgbClr val="93A4B8"/>
                 </a:solidFill>
@@ -6873,7 +6873,7 @@
               </a:rPr>
               <a:t>1.00</a:t>
             </a:r>
-            <a:endParaRPr lang="en-US" sz="1000" dirty="0"/>
+            <a:endParaRPr lang="en-US" sz="950" dirty="0"/>
           </a:p>
         </p:txBody>
       </p:sp>
@@ -6885,24 +6885,24 @@
         </p:nvSpPr>
         <p:spPr>
           <a:xfrm>
-            <a:off x="5916168" y="3840480"/>
-            <a:ext cx="1737360" cy="292608"/>
-          </a:xfrm>
-          <a:prstGeom prst="rect">
-            <a:avLst/>
-          </a:prstGeom>
-          <a:noFill/>
-          <a:ln/>
-        </p:spPr>
-        <p:txBody>
-          <a:bodyPr wrap="square" lIns="0" tIns="0" rIns="0" bIns="0" rtlCol="0" anchor="ctr"/>
-          <a:lstStyle/>
-          <a:p>
-            <a:pPr indent="0" marL="0">
-              <a:buNone/>
-            </a:pPr>
-            <a:r>
-              <a:rPr lang="en-US" sz="1000" dirty="0">
+            <a:off x="5916168" y="3785616"/>
+            <a:ext cx="1737360" cy="256032"/>
+          </a:xfrm>
+          <a:prstGeom prst="rect">
+            <a:avLst/>
+          </a:prstGeom>
+          <a:noFill/>
+          <a:ln/>
+        </p:spPr>
+        <p:txBody>
+          <a:bodyPr wrap="square" lIns="0" tIns="0" rIns="0" bIns="0" rtlCol="0" anchor="ctr"/>
+          <a:lstStyle/>
+          <a:p>
+            <a:pPr indent="0" marL="0">
+              <a:buNone/>
+            </a:pPr>
+            <a:r>
+              <a:rPr lang="en-US" sz="950" dirty="0">
                 <a:solidFill>
                   <a:srgbClr val="35D0A5"/>
                 </a:solidFill>
@@ -6910,9 +6910,9 @@
                 <a:ea typeface="Consolas" pitchFamily="34" charset="-122"/>
                 <a:cs typeface="Consolas" pitchFamily="34" charset="-120"/>
               </a:rPr>
-              <a:t>67.9%</a:t>
-            </a:r>
-            <a:endParaRPr lang="en-US" sz="1000" dirty="0"/>
+              <a:t>68%</a:t>
+            </a:r>
+            <a:endParaRPr lang="en-US" sz="950" dirty="0"/>
           </a:p>
         </p:txBody>
       </p:sp>
@@ -6924,24 +6924,24 @@
         </p:nvSpPr>
         <p:spPr>
           <a:xfrm>
-            <a:off x="768096" y="4242816"/>
-            <a:ext cx="1737360" cy="292608"/>
-          </a:xfrm>
-          <a:prstGeom prst="rect">
-            <a:avLst/>
-          </a:prstGeom>
-          <a:noFill/>
-          <a:ln/>
-        </p:spPr>
-        <p:txBody>
-          <a:bodyPr wrap="square" lIns="0" tIns="0" rIns="0" bIns="0" rtlCol="0" anchor="ctr"/>
-          <a:lstStyle/>
-          <a:p>
-            <a:pPr indent="0" marL="0">
-              <a:buNone/>
-            </a:pPr>
-            <a:r>
-              <a:rPr lang="en-US" sz="1000" dirty="0">
+            <a:off x="768096" y="4069080"/>
+            <a:ext cx="1737360" cy="256032"/>
+          </a:xfrm>
+          <a:prstGeom prst="rect">
+            <a:avLst/>
+          </a:prstGeom>
+          <a:noFill/>
+          <a:ln/>
+        </p:spPr>
+        <p:txBody>
+          <a:bodyPr wrap="square" lIns="0" tIns="0" rIns="0" bIns="0" rtlCol="0" anchor="ctr"/>
+          <a:lstStyle/>
+          <a:p>
+            <a:pPr indent="0" marL="0">
+              <a:buNone/>
+            </a:pPr>
+            <a:r>
+              <a:rPr lang="en-US" sz="950" dirty="0">
                 <a:solidFill>
                   <a:srgbClr val="E9EFF6"/>
                 </a:solidFill>
@@ -6951,7 +6951,7 @@
               </a:rPr>
               <a:t>Juniper Junos</a:t>
             </a:r>
-            <a:endParaRPr lang="en-US" sz="1000" dirty="0"/>
+            <a:endParaRPr lang="en-US" sz="950" dirty="0"/>
           </a:p>
         </p:txBody>
       </p:sp>
@@ -6963,24 +6963,24 @@
         </p:nvSpPr>
         <p:spPr>
           <a:xfrm>
-            <a:off x="2670048" y="4242816"/>
-            <a:ext cx="1828800" cy="292608"/>
-          </a:xfrm>
-          <a:prstGeom prst="rect">
-            <a:avLst/>
-          </a:prstGeom>
-          <a:noFill/>
-          <a:ln/>
-        </p:spPr>
-        <p:txBody>
-          <a:bodyPr wrap="square" lIns="0" tIns="0" rIns="0" bIns="0" rtlCol="0" anchor="ctr"/>
-          <a:lstStyle/>
-          <a:p>
-            <a:pPr indent="0" marL="0">
-              <a:buNone/>
-            </a:pPr>
-            <a:r>
-              <a:rPr lang="en-US" sz="1000" dirty="0">
+            <a:off x="2670048" y="4069080"/>
+            <a:ext cx="1828800" cy="256032"/>
+          </a:xfrm>
+          <a:prstGeom prst="rect">
+            <a:avLst/>
+          </a:prstGeom>
+          <a:noFill/>
+          <a:ln/>
+        </p:spPr>
+        <p:txBody>
+          <a:bodyPr wrap="square" lIns="0" tIns="0" rIns="0" bIns="0" rtlCol="0" anchor="ctr"/>
+          <a:lstStyle/>
+          <a:p>
+            <a:pPr indent="0" marL="0">
+              <a:buNone/>
+            </a:pPr>
+            <a:r>
+              <a:rPr lang="en-US" sz="950" dirty="0">
                 <a:solidFill>
                   <a:srgbClr val="93A4B8"/>
                 </a:solidFill>
@@ -6990,7 +6990,7 @@
               </a:rPr>
               <a:t>SRX 340</a:t>
             </a:r>
-            <a:endParaRPr lang="en-US" sz="1000" dirty="0"/>
+            <a:endParaRPr lang="en-US" sz="950" dirty="0"/>
           </a:p>
         </p:txBody>
       </p:sp>
@@ -7002,24 +7002,24 @@
         </p:nvSpPr>
         <p:spPr>
           <a:xfrm>
-            <a:off x="4544568" y="4242816"/>
-            <a:ext cx="1737360" cy="292608"/>
-          </a:xfrm>
-          <a:prstGeom prst="rect">
-            <a:avLst/>
-          </a:prstGeom>
-          <a:noFill/>
-          <a:ln/>
-        </p:spPr>
-        <p:txBody>
-          <a:bodyPr wrap="square" lIns="0" tIns="0" rIns="0" bIns="0" rtlCol="0" anchor="ctr"/>
-          <a:lstStyle/>
-          <a:p>
-            <a:pPr indent="0" marL="0">
-              <a:buNone/>
-            </a:pPr>
-            <a:r>
-              <a:rPr lang="en-US" sz="1000" dirty="0">
+            <a:off x="4544568" y="4069080"/>
+            <a:ext cx="1737360" cy="256032"/>
+          </a:xfrm>
+          <a:prstGeom prst="rect">
+            <a:avLst/>
+          </a:prstGeom>
+          <a:noFill/>
+          <a:ln/>
+        </p:spPr>
+        <p:txBody>
+          <a:bodyPr wrap="square" lIns="0" tIns="0" rIns="0" bIns="0" rtlCol="0" anchor="ctr"/>
+          <a:lstStyle/>
+          <a:p>
+            <a:pPr indent="0" marL="0">
+              <a:buNone/>
+            </a:pPr>
+            <a:r>
+              <a:rPr lang="en-US" sz="950" dirty="0">
                 <a:solidFill>
                   <a:srgbClr val="93A4B8"/>
                 </a:solidFill>
@@ -7029,7 +7029,7 @@
               </a:rPr>
               <a:t>1.00</a:t>
             </a:r>
-            <a:endParaRPr lang="en-US" sz="1000" dirty="0"/>
+            <a:endParaRPr lang="en-US" sz="950" dirty="0"/>
           </a:p>
         </p:txBody>
       </p:sp>
@@ -7041,24 +7041,24 @@
         </p:nvSpPr>
         <p:spPr>
           <a:xfrm>
-            <a:off x="5916168" y="4242816"/>
-            <a:ext cx="1737360" cy="292608"/>
-          </a:xfrm>
-          <a:prstGeom prst="rect">
-            <a:avLst/>
-          </a:prstGeom>
-          <a:noFill/>
-          <a:ln/>
-        </p:spPr>
-        <p:txBody>
-          <a:bodyPr wrap="square" lIns="0" tIns="0" rIns="0" bIns="0" rtlCol="0" anchor="ctr"/>
-          <a:lstStyle/>
-          <a:p>
-            <a:pPr indent="0" marL="0">
-              <a:buNone/>
-            </a:pPr>
-            <a:r>
-              <a:rPr lang="en-US" sz="1000" dirty="0">
+            <a:off x="5916168" y="4069080"/>
+            <a:ext cx="1737360" cy="256032"/>
+          </a:xfrm>
+          <a:prstGeom prst="rect">
+            <a:avLst/>
+          </a:prstGeom>
+          <a:noFill/>
+          <a:ln/>
+        </p:spPr>
+        <p:txBody>
+          <a:bodyPr wrap="square" lIns="0" tIns="0" rIns="0" bIns="0" rtlCol="0" anchor="ctr"/>
+          <a:lstStyle/>
+          <a:p>
+            <a:pPr indent="0" marL="0">
+              <a:buNone/>
+            </a:pPr>
+            <a:r>
+              <a:rPr lang="en-US" sz="950" dirty="0">
                 <a:solidFill>
                   <a:srgbClr val="35D0A5"/>
                 </a:solidFill>
@@ -7066,9 +7066,9 @@
                 <a:ea typeface="Consolas" pitchFamily="34" charset="-122"/>
                 <a:cs typeface="Consolas" pitchFamily="34" charset="-120"/>
               </a:rPr>
-              <a:t>78.9%</a:t>
-            </a:r>
-            <a:endParaRPr lang="en-US" sz="1000" dirty="0"/>
+              <a:t>79%</a:t>
+            </a:r>
+            <a:endParaRPr lang="en-US" sz="950" dirty="0"/>
           </a:p>
         </p:txBody>
       </p:sp>
@@ -7080,24 +7080,24 @@
         </p:nvSpPr>
         <p:spPr>
           <a:xfrm>
-            <a:off x="768096" y="4645152"/>
-            <a:ext cx="1737360" cy="292608"/>
-          </a:xfrm>
-          <a:prstGeom prst="rect">
-            <a:avLst/>
-          </a:prstGeom>
-          <a:noFill/>
-          <a:ln/>
-        </p:spPr>
-        <p:txBody>
-          <a:bodyPr wrap="square" lIns="0" tIns="0" rIns="0" bIns="0" rtlCol="0" anchor="ctr"/>
-          <a:lstStyle/>
-          <a:p>
-            <a:pPr indent="0" marL="0">
-              <a:buNone/>
-            </a:pPr>
-            <a:r>
-              <a:rPr lang="en-US" sz="1000" dirty="0">
+            <a:off x="768096" y="4352544"/>
+            <a:ext cx="1737360" cy="256032"/>
+          </a:xfrm>
+          <a:prstGeom prst="rect">
+            <a:avLst/>
+          </a:prstGeom>
+          <a:noFill/>
+          <a:ln/>
+        </p:spPr>
+        <p:txBody>
+          <a:bodyPr wrap="square" lIns="0" tIns="0" rIns="0" bIns="0" rtlCol="0" anchor="ctr"/>
+          <a:lstStyle/>
+          <a:p>
+            <a:pPr indent="0" marL="0">
+              <a:buNone/>
+            </a:pPr>
+            <a:r>
+              <a:rPr lang="en-US" sz="950" dirty="0">
                 <a:solidFill>
                   <a:srgbClr val="E9EFF6"/>
                 </a:solidFill>
@@ -7107,7 +7107,7 @@
               </a:rPr>
               <a:t>Fortinet FortiOS</a:t>
             </a:r>
-            <a:endParaRPr lang="en-US" sz="1000" dirty="0"/>
+            <a:endParaRPr lang="en-US" sz="950" dirty="0"/>
           </a:p>
         </p:txBody>
       </p:sp>
@@ -7119,24 +7119,24 @@
         </p:nvSpPr>
         <p:spPr>
           <a:xfrm>
-            <a:off x="2670048" y="4645152"/>
-            <a:ext cx="1828800" cy="292608"/>
-          </a:xfrm>
-          <a:prstGeom prst="rect">
-            <a:avLst/>
-          </a:prstGeom>
-          <a:noFill/>
-          <a:ln/>
-        </p:spPr>
-        <p:txBody>
-          <a:bodyPr wrap="square" lIns="0" tIns="0" rIns="0" bIns="0" rtlCol="0" anchor="ctr"/>
-          <a:lstStyle/>
-          <a:p>
-            <a:pPr indent="0" marL="0">
-              <a:buNone/>
-            </a:pPr>
-            <a:r>
-              <a:rPr lang="en-US" sz="1000" dirty="0">
+            <a:off x="2670048" y="4352544"/>
+            <a:ext cx="1828800" cy="256032"/>
+          </a:xfrm>
+          <a:prstGeom prst="rect">
+            <a:avLst/>
+          </a:prstGeom>
+          <a:noFill/>
+          <a:ln/>
+        </p:spPr>
+        <p:txBody>
+          <a:bodyPr wrap="square" lIns="0" tIns="0" rIns="0" bIns="0" rtlCol="0" anchor="ctr"/>
+          <a:lstStyle/>
+          <a:p>
+            <a:pPr indent="0" marL="0">
+              <a:buNone/>
+            </a:pPr>
+            <a:r>
+              <a:rPr lang="en-US" sz="950" dirty="0">
                 <a:solidFill>
                   <a:srgbClr val="93A4B8"/>
                 </a:solidFill>
@@ -7146,7 +7146,7 @@
               </a:rPr>
               <a:t>FortiGate 100F</a:t>
             </a:r>
-            <a:endParaRPr lang="en-US" sz="1000" dirty="0"/>
+            <a:endParaRPr lang="en-US" sz="950" dirty="0"/>
           </a:p>
         </p:txBody>
       </p:sp>
@@ -7158,24 +7158,24 @@
         </p:nvSpPr>
         <p:spPr>
           <a:xfrm>
-            <a:off x="4544568" y="4645152"/>
-            <a:ext cx="1737360" cy="292608"/>
-          </a:xfrm>
-          <a:prstGeom prst="rect">
-            <a:avLst/>
-          </a:prstGeom>
-          <a:noFill/>
-          <a:ln/>
-        </p:spPr>
-        <p:txBody>
-          <a:bodyPr wrap="square" lIns="0" tIns="0" rIns="0" bIns="0" rtlCol="0" anchor="ctr"/>
-          <a:lstStyle/>
-          <a:p>
-            <a:pPr indent="0" marL="0">
-              <a:buNone/>
-            </a:pPr>
-            <a:r>
-              <a:rPr lang="en-US" sz="1000" dirty="0">
+            <a:off x="4544568" y="4352544"/>
+            <a:ext cx="1737360" cy="256032"/>
+          </a:xfrm>
+          <a:prstGeom prst="rect">
+            <a:avLst/>
+          </a:prstGeom>
+          <a:noFill/>
+          <a:ln/>
+        </p:spPr>
+        <p:txBody>
+          <a:bodyPr wrap="square" lIns="0" tIns="0" rIns="0" bIns="0" rtlCol="0" anchor="ctr"/>
+          <a:lstStyle/>
+          <a:p>
+            <a:pPr indent="0" marL="0">
+              <a:buNone/>
+            </a:pPr>
+            <a:r>
+              <a:rPr lang="en-US" sz="950" dirty="0">
                 <a:solidFill>
                   <a:srgbClr val="93A4B8"/>
                 </a:solidFill>
@@ -7185,7 +7185,7 @@
               </a:rPr>
               <a:t>1.00</a:t>
             </a:r>
-            <a:endParaRPr lang="en-US" sz="1000" dirty="0"/>
+            <a:endParaRPr lang="en-US" sz="950" dirty="0"/>
           </a:p>
         </p:txBody>
       </p:sp>
@@ -7197,24 +7197,24 @@
         </p:nvSpPr>
         <p:spPr>
           <a:xfrm>
-            <a:off x="5916168" y="4645152"/>
-            <a:ext cx="1737360" cy="292608"/>
-          </a:xfrm>
-          <a:prstGeom prst="rect">
-            <a:avLst/>
-          </a:prstGeom>
-          <a:noFill/>
-          <a:ln/>
-        </p:spPr>
-        <p:txBody>
-          <a:bodyPr wrap="square" lIns="0" tIns="0" rIns="0" bIns="0" rtlCol="0" anchor="ctr"/>
-          <a:lstStyle/>
-          <a:p>
-            <a:pPr indent="0" marL="0">
-              <a:buNone/>
-            </a:pPr>
-            <a:r>
-              <a:rPr lang="en-US" sz="1000" dirty="0">
+            <a:off x="5916168" y="4352544"/>
+            <a:ext cx="1737360" cy="256032"/>
+          </a:xfrm>
+          <a:prstGeom prst="rect">
+            <a:avLst/>
+          </a:prstGeom>
+          <a:noFill/>
+          <a:ln/>
+        </p:spPr>
+        <p:txBody>
+          <a:bodyPr wrap="square" lIns="0" tIns="0" rIns="0" bIns="0" rtlCol="0" anchor="ctr"/>
+          <a:lstStyle/>
+          <a:p>
+            <a:pPr indent="0" marL="0">
+              <a:buNone/>
+            </a:pPr>
+            <a:r>
+              <a:rPr lang="en-US" sz="950" dirty="0">
                 <a:solidFill>
                   <a:srgbClr val="35D0A5"/>
                 </a:solidFill>
@@ -7224,7 +7224,7 @@
               </a:rPr>
               <a:t>100%</a:t>
             </a:r>
-            <a:endParaRPr lang="en-US" sz="1000" dirty="0"/>
+            <a:endParaRPr lang="en-US" sz="950" dirty="0"/>
           </a:p>
         </p:txBody>
       </p:sp>
@@ -7236,24 +7236,24 @@
         </p:nvSpPr>
         <p:spPr>
           <a:xfrm>
-            <a:off x="768096" y="5047488"/>
-            <a:ext cx="1737360" cy="292608"/>
-          </a:xfrm>
-          <a:prstGeom prst="rect">
-            <a:avLst/>
-          </a:prstGeom>
-          <a:noFill/>
-          <a:ln/>
-        </p:spPr>
-        <p:txBody>
-          <a:bodyPr wrap="square" lIns="0" tIns="0" rIns="0" bIns="0" rtlCol="0" anchor="ctr"/>
-          <a:lstStyle/>
-          <a:p>
-            <a:pPr indent="0" marL="0">
-              <a:buNone/>
-            </a:pPr>
-            <a:r>
-              <a:rPr lang="en-US" sz="1000" dirty="0">
+            <a:off x="768096" y="4636008"/>
+            <a:ext cx="1737360" cy="256032"/>
+          </a:xfrm>
+          <a:prstGeom prst="rect">
+            <a:avLst/>
+          </a:prstGeom>
+          <a:noFill/>
+          <a:ln/>
+        </p:spPr>
+        <p:txBody>
+          <a:bodyPr wrap="square" lIns="0" tIns="0" rIns="0" bIns="0" rtlCol="0" anchor="ctr"/>
+          <a:lstStyle/>
+          <a:p>
+            <a:pPr indent="0" marL="0">
+              <a:buNone/>
+            </a:pPr>
+            <a:r>
+              <a:rPr lang="en-US" sz="950" dirty="0">
                 <a:solidFill>
                   <a:srgbClr val="E9EFF6"/>
                 </a:solidFill>
@@ -7261,9 +7261,9 @@
                 <a:ea typeface="Calibri" pitchFamily="34" charset="-122"/>
                 <a:cs typeface="Calibri" pitchFamily="34" charset="-120"/>
               </a:rPr>
-              <a:t>MikroTik RouterOS</a:t>
-            </a:r>
-            <a:endParaRPr lang="en-US" sz="1000" dirty="0"/>
+              <a:t>Palo Alto PAN-OS</a:t>
+            </a:r>
+            <a:endParaRPr lang="en-US" sz="950" dirty="0"/>
           </a:p>
         </p:txBody>
       </p:sp>
@@ -7275,24 +7275,24 @@
         </p:nvSpPr>
         <p:spPr>
           <a:xfrm>
-            <a:off x="2670048" y="5047488"/>
-            <a:ext cx="1828800" cy="292608"/>
-          </a:xfrm>
-          <a:prstGeom prst="rect">
-            <a:avLst/>
-          </a:prstGeom>
-          <a:noFill/>
-          <a:ln/>
-        </p:spPr>
-        <p:txBody>
-          <a:bodyPr wrap="square" lIns="0" tIns="0" rIns="0" bIns="0" rtlCol="0" anchor="ctr"/>
-          <a:lstStyle/>
-          <a:p>
-            <a:pPr indent="0" marL="0">
-              <a:buNone/>
-            </a:pPr>
-            <a:r>
-              <a:rPr lang="en-US" sz="1000" dirty="0">
+            <a:off x="2670048" y="4636008"/>
+            <a:ext cx="1828800" cy="256032"/>
+          </a:xfrm>
+          <a:prstGeom prst="rect">
+            <a:avLst/>
+          </a:prstGeom>
+          <a:noFill/>
+          <a:ln/>
+        </p:spPr>
+        <p:txBody>
+          <a:bodyPr wrap="square" lIns="0" tIns="0" rIns="0" bIns="0" rtlCol="0" anchor="ctr"/>
+          <a:lstStyle/>
+          <a:p>
+            <a:pPr indent="0" marL="0">
+              <a:buNone/>
+            </a:pPr>
+            <a:r>
+              <a:rPr lang="en-US" sz="950" dirty="0">
                 <a:solidFill>
                   <a:srgbClr val="93A4B8"/>
                 </a:solidFill>
@@ -7300,9 +7300,9 @@
                 <a:ea typeface="Calibri" pitchFamily="34" charset="-122"/>
                 <a:cs typeface="Calibri" pitchFamily="34" charset="-120"/>
               </a:rPr>
-              <a:t>RB4011 — no parser</a:t>
-            </a:r>
-            <a:endParaRPr lang="en-US" sz="1000" dirty="0"/>
+              <a:t>PA-3220</a:t>
+            </a:r>
+            <a:endParaRPr lang="en-US" sz="950" dirty="0"/>
           </a:p>
         </p:txBody>
       </p:sp>
@@ -7314,24 +7314,24 @@
         </p:nvSpPr>
         <p:spPr>
           <a:xfrm>
-            <a:off x="4544568" y="5047488"/>
-            <a:ext cx="1737360" cy="292608"/>
-          </a:xfrm>
-          <a:prstGeom prst="rect">
-            <a:avLst/>
-          </a:prstGeom>
-          <a:noFill/>
-          <a:ln/>
-        </p:spPr>
-        <p:txBody>
-          <a:bodyPr wrap="square" lIns="0" tIns="0" rIns="0" bIns="0" rtlCol="0" anchor="ctr"/>
-          <a:lstStyle/>
-          <a:p>
-            <a:pPr indent="0" marL="0">
-              <a:buNone/>
-            </a:pPr>
-            <a:r>
-              <a:rPr lang="en-US" sz="1000" dirty="0">
+            <a:off x="4544568" y="4636008"/>
+            <a:ext cx="1737360" cy="256032"/>
+          </a:xfrm>
+          <a:prstGeom prst="rect">
+            <a:avLst/>
+          </a:prstGeom>
+          <a:noFill/>
+          <a:ln/>
+        </p:spPr>
+        <p:txBody>
+          <a:bodyPr wrap="square" lIns="0" tIns="0" rIns="0" bIns="0" rtlCol="0" anchor="ctr"/>
+          <a:lstStyle/>
+          <a:p>
+            <a:pPr indent="0" marL="0">
+              <a:buNone/>
+            </a:pPr>
+            <a:r>
+              <a:rPr lang="en-US" sz="950" dirty="0">
                 <a:solidFill>
                   <a:srgbClr val="93A4B8"/>
                 </a:solidFill>
@@ -7339,9 +7339,9 @@
                 <a:ea typeface="Consolas" pitchFamily="34" charset="-122"/>
                 <a:cs typeface="Consolas" pitchFamily="34" charset="-120"/>
               </a:rPr>
-              <a:t>unknown</a:t>
-            </a:r>
-            <a:endParaRPr lang="en-US" sz="1000" dirty="0"/>
+              <a:t>1.00</a:t>
+            </a:r>
+            <a:endParaRPr lang="en-US" sz="950" dirty="0"/>
           </a:p>
         </p:txBody>
       </p:sp>
@@ -7353,40 +7353,352 @@
         </p:nvSpPr>
         <p:spPr>
           <a:xfrm>
-            <a:off x="5916168" y="5047488"/>
-            <a:ext cx="1737360" cy="292608"/>
-          </a:xfrm>
-          <a:prstGeom prst="rect">
-            <a:avLst/>
-          </a:prstGeom>
-          <a:noFill/>
-          <a:ln/>
-        </p:spPr>
-        <p:txBody>
-          <a:bodyPr wrap="square" lIns="0" tIns="0" rIns="0" bIns="0" rtlCol="0" anchor="ctr"/>
-          <a:lstStyle/>
-          <a:p>
-            <a:pPr indent="0" marL="0">
-              <a:buNone/>
-            </a:pPr>
-            <a:r>
-              <a:rPr lang="en-US" sz="1000" dirty="0">
-                <a:solidFill>
-                  <a:srgbClr val="FFA23C"/>
+            <a:off x="5916168" y="4636008"/>
+            <a:ext cx="1737360" cy="256032"/>
+          </a:xfrm>
+          <a:prstGeom prst="rect">
+            <a:avLst/>
+          </a:prstGeom>
+          <a:noFill/>
+          <a:ln/>
+        </p:spPr>
+        <p:txBody>
+          <a:bodyPr wrap="square" lIns="0" tIns="0" rIns="0" bIns="0" rtlCol="0" anchor="ctr"/>
+          <a:lstStyle/>
+          <a:p>
+            <a:pPr indent="0" marL="0">
+              <a:buNone/>
+            </a:pPr>
+            <a:r>
+              <a:rPr lang="en-US" sz="950" dirty="0">
+                <a:solidFill>
+                  <a:srgbClr val="35D0A5"/>
                 </a:solidFill>
                 <a:latin typeface="Consolas" pitchFamily="34" charset="0"/>
                 <a:ea typeface="Consolas" pitchFamily="34" charset="-122"/>
                 <a:cs typeface="Consolas" pitchFamily="34" charset="-120"/>
               </a:rPr>
+              <a:t>94%</a:t>
+            </a:r>
+            <a:endParaRPr lang="en-US" sz="950" dirty="0"/>
+          </a:p>
+        </p:txBody>
+      </p:sp>
+      <p:sp>
+        <p:nvSpPr>
+          <p:cNvPr id="41" name="Text 39"/>
+          <p:cNvSpPr txBox="1"/>
+          <p:nvPr/>
+        </p:nvSpPr>
+        <p:spPr>
+          <a:xfrm>
+            <a:off x="768096" y="4919472"/>
+            <a:ext cx="1737360" cy="256032"/>
+          </a:xfrm>
+          <a:prstGeom prst="rect">
+            <a:avLst/>
+          </a:prstGeom>
+          <a:noFill/>
+          <a:ln/>
+        </p:spPr>
+        <p:txBody>
+          <a:bodyPr wrap="square" lIns="0" tIns="0" rIns="0" bIns="0" rtlCol="0" anchor="ctr"/>
+          <a:lstStyle/>
+          <a:p>
+            <a:pPr indent="0" marL="0">
+              <a:buNone/>
+            </a:pPr>
+            <a:r>
+              <a:rPr lang="en-US" sz="950" dirty="0">
+                <a:solidFill>
+                  <a:srgbClr val="E9EFF6"/>
+                </a:solidFill>
+                <a:latin typeface="Calibri" pitchFamily="34" charset="0"/>
+                <a:ea typeface="Calibri" pitchFamily="34" charset="-122"/>
+                <a:cs typeface="Calibri" pitchFamily="34" charset="-120"/>
+              </a:rPr>
+              <a:t>AWS Security Group</a:t>
+            </a:r>
+            <a:endParaRPr lang="en-US" sz="950" dirty="0"/>
+          </a:p>
+        </p:txBody>
+      </p:sp>
+      <p:sp>
+        <p:nvSpPr>
+          <p:cNvPr id="42" name="Text 40"/>
+          <p:cNvSpPr txBox="1"/>
+          <p:nvPr/>
+        </p:nvSpPr>
+        <p:spPr>
+          <a:xfrm>
+            <a:off x="2670048" y="4919472"/>
+            <a:ext cx="1828800" cy="256032"/>
+          </a:xfrm>
+          <a:prstGeom prst="rect">
+            <a:avLst/>
+          </a:prstGeom>
+          <a:noFill/>
+          <a:ln/>
+        </p:spPr>
+        <p:txBody>
+          <a:bodyPr wrap="square" lIns="0" tIns="0" rIns="0" bIns="0" rtlCol="0" anchor="ctr"/>
+          <a:lstStyle/>
+          <a:p>
+            <a:pPr indent="0" marL="0">
+              <a:buNone/>
+            </a:pPr>
+            <a:r>
+              <a:rPr lang="en-US" sz="950" dirty="0">
+                <a:solidFill>
+                  <a:srgbClr val="93A4B8"/>
+                </a:solidFill>
+                <a:latin typeface="Calibri" pitchFamily="34" charset="0"/>
+                <a:ea typeface="Calibri" pitchFamily="34" charset="-122"/>
+                <a:cs typeface="Calibri" pitchFamily="34" charset="-120"/>
+              </a:rPr>
+              <a:t>JSON, not a CLI</a:t>
+            </a:r>
+            <a:endParaRPr lang="en-US" sz="950" dirty="0"/>
+          </a:p>
+        </p:txBody>
+      </p:sp>
+      <p:sp>
+        <p:nvSpPr>
+          <p:cNvPr id="43" name="Text 41"/>
+          <p:cNvSpPr txBox="1"/>
+          <p:nvPr/>
+        </p:nvSpPr>
+        <p:spPr>
+          <a:xfrm>
+            <a:off x="4544568" y="4919472"/>
+            <a:ext cx="1737360" cy="256032"/>
+          </a:xfrm>
+          <a:prstGeom prst="rect">
+            <a:avLst/>
+          </a:prstGeom>
+          <a:noFill/>
+          <a:ln/>
+        </p:spPr>
+        <p:txBody>
+          <a:bodyPr wrap="square" lIns="0" tIns="0" rIns="0" bIns="0" rtlCol="0" anchor="ctr"/>
+          <a:lstStyle/>
+          <a:p>
+            <a:pPr indent="0" marL="0">
+              <a:buNone/>
+            </a:pPr>
+            <a:r>
+              <a:rPr lang="en-US" sz="950" dirty="0">
+                <a:solidFill>
+                  <a:srgbClr val="93A4B8"/>
+                </a:solidFill>
+                <a:latin typeface="Consolas" pitchFamily="34" charset="0"/>
+                <a:ea typeface="Consolas" pitchFamily="34" charset="-122"/>
+                <a:cs typeface="Consolas" pitchFamily="34" charset="-120"/>
+              </a:rPr>
+              <a:t>1.00</a:t>
+            </a:r>
+            <a:endParaRPr lang="en-US" sz="950" dirty="0"/>
+          </a:p>
+        </p:txBody>
+      </p:sp>
+      <p:sp>
+        <p:nvSpPr>
+          <p:cNvPr id="44" name="Text 42"/>
+          <p:cNvSpPr txBox="1"/>
+          <p:nvPr/>
+        </p:nvSpPr>
+        <p:spPr>
+          <a:xfrm>
+            <a:off x="5916168" y="4919472"/>
+            <a:ext cx="1737360" cy="256032"/>
+          </a:xfrm>
+          <a:prstGeom prst="rect">
+            <a:avLst/>
+          </a:prstGeom>
+          <a:noFill/>
+          <a:ln/>
+        </p:spPr>
+        <p:txBody>
+          <a:bodyPr wrap="square" lIns="0" tIns="0" rIns="0" bIns="0" rtlCol="0" anchor="ctr"/>
+          <a:lstStyle/>
+          <a:p>
+            <a:pPr indent="0" marL="0">
+              <a:buNone/>
+            </a:pPr>
+            <a:r>
+              <a:rPr lang="en-US" sz="950" dirty="0">
+                <a:solidFill>
+                  <a:srgbClr val="35D0A5"/>
+                </a:solidFill>
+                <a:latin typeface="Consolas" pitchFamily="34" charset="0"/>
+                <a:ea typeface="Consolas" pitchFamily="34" charset="-122"/>
+                <a:cs typeface="Consolas" pitchFamily="34" charset="-120"/>
+              </a:rPr>
+              <a:t>100% · 21 N/A</a:t>
+            </a:r>
+            <a:endParaRPr lang="en-US" sz="950" dirty="0"/>
+          </a:p>
+        </p:txBody>
+      </p:sp>
+      <p:sp>
+        <p:nvSpPr>
+          <p:cNvPr id="45" name="Text 43"/>
+          <p:cNvSpPr txBox="1"/>
+          <p:nvPr/>
+        </p:nvSpPr>
+        <p:spPr>
+          <a:xfrm>
+            <a:off x="768096" y="5202936"/>
+            <a:ext cx="1737360" cy="256032"/>
+          </a:xfrm>
+          <a:prstGeom prst="rect">
+            <a:avLst/>
+          </a:prstGeom>
+          <a:noFill/>
+          <a:ln/>
+        </p:spPr>
+        <p:txBody>
+          <a:bodyPr wrap="square" lIns="0" tIns="0" rIns="0" bIns="0" rtlCol="0" anchor="ctr"/>
+          <a:lstStyle/>
+          <a:p>
+            <a:pPr indent="0" marL="0">
+              <a:buNone/>
+            </a:pPr>
+            <a:r>
+              <a:rPr lang="en-US" sz="950" dirty="0">
+                <a:solidFill>
+                  <a:srgbClr val="E9EFF6"/>
+                </a:solidFill>
+                <a:latin typeface="Calibri" pitchFamily="34" charset="0"/>
+                <a:ea typeface="Calibri" pitchFamily="34" charset="-122"/>
+                <a:cs typeface="Calibri" pitchFamily="34" charset="-120"/>
+              </a:rPr>
+              <a:t>MikroTik RouterOS</a:t>
+            </a:r>
+            <a:endParaRPr lang="en-US" sz="950" dirty="0"/>
+          </a:p>
+        </p:txBody>
+      </p:sp>
+      <p:sp>
+        <p:nvSpPr>
+          <p:cNvPr id="46" name="Text 44"/>
+          <p:cNvSpPr txBox="1"/>
+          <p:nvPr/>
+        </p:nvSpPr>
+        <p:spPr>
+          <a:xfrm>
+            <a:off x="2670048" y="5202936"/>
+            <a:ext cx="1828800" cy="256032"/>
+          </a:xfrm>
+          <a:prstGeom prst="rect">
+            <a:avLst/>
+          </a:prstGeom>
+          <a:noFill/>
+          <a:ln/>
+        </p:spPr>
+        <p:txBody>
+          <a:bodyPr wrap="square" lIns="0" tIns="0" rIns="0" bIns="0" rtlCol="0" anchor="ctr"/>
+          <a:lstStyle/>
+          <a:p>
+            <a:pPr indent="0" marL="0">
+              <a:buNone/>
+            </a:pPr>
+            <a:r>
+              <a:rPr lang="en-US" sz="950" dirty="0">
+                <a:solidFill>
+                  <a:srgbClr val="93A4B8"/>
+                </a:solidFill>
+                <a:latin typeface="Calibri" pitchFamily="34" charset="0"/>
+                <a:ea typeface="Calibri" pitchFamily="34" charset="-122"/>
+                <a:cs typeface="Calibri" pitchFamily="34" charset="-120"/>
+              </a:rPr>
+              <a:t>RB4011 — no parser</a:t>
+            </a:r>
+            <a:endParaRPr lang="en-US" sz="950" dirty="0"/>
+          </a:p>
+        </p:txBody>
+      </p:sp>
+      <p:sp>
+        <p:nvSpPr>
+          <p:cNvPr id="47" name="Text 45"/>
+          <p:cNvSpPr txBox="1"/>
+          <p:nvPr/>
+        </p:nvSpPr>
+        <p:spPr>
+          <a:xfrm>
+            <a:off x="4544568" y="5202936"/>
+            <a:ext cx="1737360" cy="256032"/>
+          </a:xfrm>
+          <a:prstGeom prst="rect">
+            <a:avLst/>
+          </a:prstGeom>
+          <a:noFill/>
+          <a:ln/>
+        </p:spPr>
+        <p:txBody>
+          <a:bodyPr wrap="square" lIns="0" tIns="0" rIns="0" bIns="0" rtlCol="0" anchor="ctr"/>
+          <a:lstStyle/>
+          <a:p>
+            <a:pPr indent="0" marL="0">
+              <a:buNone/>
+            </a:pPr>
+            <a:r>
+              <a:rPr lang="en-US" sz="950" dirty="0">
+                <a:solidFill>
+                  <a:srgbClr val="93A4B8"/>
+                </a:solidFill>
+                <a:latin typeface="Consolas" pitchFamily="34" charset="0"/>
+                <a:ea typeface="Consolas" pitchFamily="34" charset="-122"/>
+                <a:cs typeface="Consolas" pitchFamily="34" charset="-120"/>
+              </a:rPr>
+              <a:t>unknown</a:t>
+            </a:r>
+            <a:endParaRPr lang="en-US" sz="950" dirty="0"/>
+          </a:p>
+        </p:txBody>
+      </p:sp>
+      <p:sp>
+        <p:nvSpPr>
+          <p:cNvPr id="48" name="Text 46"/>
+          <p:cNvSpPr txBox="1"/>
+          <p:nvPr/>
+        </p:nvSpPr>
+        <p:spPr>
+          <a:xfrm>
+            <a:off x="5916168" y="5202936"/>
+            <a:ext cx="1737360" cy="256032"/>
+          </a:xfrm>
+          <a:prstGeom prst="rect">
+            <a:avLst/>
+          </a:prstGeom>
+          <a:noFill/>
+          <a:ln/>
+        </p:spPr>
+        <p:txBody>
+          <a:bodyPr wrap="square" lIns="0" tIns="0" rIns="0" bIns="0" rtlCol="0" anchor="ctr"/>
+          <a:lstStyle/>
+          <a:p>
+            <a:pPr indent="0" marL="0">
+              <a:buNone/>
+            </a:pPr>
+            <a:r>
+              <a:rPr lang="en-US" sz="950" dirty="0">
+                <a:solidFill>
+                  <a:srgbClr val="FFA23C"/>
+                </a:solidFill>
+                <a:latin typeface="Consolas" pitchFamily="34" charset="0"/>
+                <a:ea typeface="Consolas" pitchFamily="34" charset="-122"/>
+                <a:cs typeface="Consolas" pitchFamily="34" charset="-120"/>
+              </a:rPr>
               <a:t>0% → taught</a:t>
             </a:r>
-            <a:endParaRPr lang="en-US" sz="1000" dirty="0"/>
-          </a:p>
-        </p:txBody>
-      </p:sp>
-      <p:sp>
-        <p:nvSpPr>
-          <p:cNvPr id="41" name="Shape 39"/>
+            <a:endParaRPr lang="en-US" sz="950" dirty="0"/>
+          </a:p>
+        </p:txBody>
+      </p:sp>
+      <p:sp>
+        <p:nvSpPr>
+          <p:cNvPr id="49" name="Shape 47"/>
           <p:cNvSpPr/>
           <p:nvPr/>
         </p:nvSpPr>
@@ -7413,7 +7725,7 @@
       </p:sp>
       <p:sp>
         <p:nvSpPr>
-          <p:cNvPr id="42" name="Text 40"/>
+          <p:cNvPr id="50" name="Text 48"/>
           <p:cNvSpPr txBox="1"/>
           <p:nvPr/>
         </p:nvSpPr>
@@ -7452,7 +7764,7 @@
       </p:sp>
       <p:sp>
         <p:nvSpPr>
-          <p:cNvPr id="43" name="Text 41"/>
+          <p:cNvPr id="51" name="Text 49"/>
           <p:cNvSpPr txBox="1"/>
           <p:nvPr/>
         </p:nvSpPr>
@@ -7491,7 +7803,7 @@
       </p:sp>
       <p:sp>
         <p:nvSpPr>
-          <p:cNvPr id="44" name="Text 42"/>
+          <p:cNvPr id="52" name="Text 50"/>
           <p:cNvSpPr txBox="1"/>
           <p:nvPr/>
         </p:nvSpPr>
@@ -7530,7 +7842,7 @@
       </p:sp>
       <p:sp>
         <p:nvSpPr>
-          <p:cNvPr id="45" name="Text 43"/>
+          <p:cNvPr id="53" name="Text 51"/>
           <p:cNvSpPr txBox="1"/>
           <p:nvPr/>
         </p:nvSpPr>
@@ -7569,7 +7881,7 @@
       </p:sp>
       <p:sp>
         <p:nvSpPr>
-          <p:cNvPr id="47" name="Text 44"/>
+          <p:cNvPr id="55" name="Text 52"/>
           <p:cNvSpPr txBox="1"/>
           <p:nvPr/>
         </p:nvSpPr>
@@ -7608,7 +7920,7 @@
       </p:sp>
       <p:sp>
         <p:nvSpPr>
-          <p:cNvPr id="48" name="Text 45"/>
+          <p:cNvPr id="56" name="Text 53"/>
           <p:cNvSpPr txBox="1"/>
           <p:nvPr/>
         </p:nvSpPr>
